--- a/docs/design/Tetris_CLI_概要資料.pptx
+++ b/docs/design/Tetris_CLI_概要資料.pptx
@@ -9188,7 +9188,7 @@
                 <a:ea typeface="Yu Gothic" pitchFamily="34" charset="-122"/>
                 <a:cs typeface="Yu Gothic" pitchFamily="34" charset="-120"/>
               </a:rPr>
-              <a:t>6</a:t>
+              <a:t>8</a:t>
             </a:r>
             <a:endParaRPr lang="en-US" sz="4800" dirty="0"/>
           </a:p>
